--- a/public/fun/pack/pptx/newspro/카드뉴스프리미엄_36_알뜰생활팁_앰버스모크.pptx
+++ b/public/fun/pack/pptx/newspro/카드뉴스프리미엄_36_알뜰생활팁_앰버스모크.pptx
@@ -113,12 +113,12 @@
   <p:extLst>
     <p:ext uri="{521415D9-36F7-43E2-AB2F-B90AF26B5E84}">
       <p14:sectionLst xmlns:p14="http://schemas.microsoft.com/office/powerpoint/2010/main">
-        <p14:section name="시작" id="{C311E412-7CF1-46D9-A1CA-0AE3FF4261D4}">
+        <p14:section name="시작" id="{189FA93A-4637-4283-9AE8-B8896FFA5CDE}">
           <p14:sldIdLst>
             <p14:sldId id="256"/>
           </p14:sldIdLst>
         </p14:section>
-        <p14:section name="본문" id="{3A302FDF-B475-43F8-A0D5-38F85A72F99F}">
+        <p14:section name="본문" id="{1F63E467-30AB-4FEA-A7FE-24B3C89A0156}">
           <p14:sldIdLst>
             <p14:sldId id="257"/>
             <p14:sldId id="258"/>
@@ -127,7 +127,7 @@
             <p14:sldId id="261"/>
           </p14:sldIdLst>
         </p14:section>
-        <p14:section name="마무리" id="{151F073E-8845-4AC5-BBFA-13BD52575D6D}">
+        <p14:section name="마무리" id="{D5CE568F-7477-424E-B3BE-549EFA1CBF9C}">
           <p14:sldIdLst>
             <p14:sldId id="262"/>
           </p14:sldIdLst>
@@ -1507,7 +1507,7 @@
             </a:lvl1pPr>
           </a:lstStyle>
           <a:p>
-            <a:fld id="{12A65613-1323-47BD-BF85-8D0CB6E4A868}" type="slidenum">
+            <a:fld id="{130DFFED-2291-450A-8ED3-1A474E18B05A}" type="slidenum">
               <a:rPr lang="en-US"/>
               <a:t>‹#›</a:t>
             </a:fld>
@@ -2101,7 +2101,7 @@
             </a:lvl1pPr>
           </a:lstStyle>
           <a:p>
-            <a:fld id="{09A995BC-30C5-446F-89F3-13BC83981980}" type="slidenum">
+            <a:fld id="{F0E5521A-062D-432A-811C-F5A9B01BDDDD}" type="slidenum">
               <a:rPr lang="en-US"/>
               <a:t>‹#›</a:t>
             </a:fld>
@@ -2727,7 +2727,7 @@
             </a:lvl1pPr>
           </a:lstStyle>
           <a:p>
-            <a:fld id="{FC28E186-D021-4B56-8155-101C94A83D22}" type="slidenum">
+            <a:fld id="{44EAE981-B393-48FE-BBAB-05EF7F8B0A0C}" type="slidenum">
               <a:rPr lang="en-US"/>
               <a:t>‹#›</a:t>
             </a:fld>
@@ -3665,7 +3665,7 @@
           <a:bodyPr/>
           <a:lstStyle/>
           <a:p>
-            <a:fld id="{14CF43B3-5198-4E49-8313-28FB0851914B}" type="slidenum">
+            <a:fld id="{685C79CC-150F-4D26-8318-1CA1A473E0E6}" type="slidenum">
               <a:rPr lang="en-US"/>
               <a:t>‹#›</a:t>
             </a:fld>
@@ -3831,7 +3831,7 @@
           <a:bodyPr/>
           <a:lstStyle/>
           <a:p>
-            <a:fld id="{8CC44D5E-89B6-46C5-AF5E-79F4F9A28142}" type="slidenum">
+            <a:fld id="{FEE03E93-91B1-4E5A-85A0-C97E21FE0E64}" type="slidenum">
               <a:rPr lang="en-US"/>
               <a:t>‹#›</a:t>
             </a:fld>
@@ -3997,7 +3997,7 @@
           <a:bodyPr/>
           <a:lstStyle/>
           <a:p>
-            <a:fld id="{4A76995D-CB0C-46C4-BF16-84907EF5D925}" type="slidenum">
+            <a:fld id="{BF5271E7-42E7-454B-97AE-93AC53FB6037}" type="slidenum">
               <a:rPr lang="en-US"/>
               <a:t>‹#›</a:t>
             </a:fld>
@@ -4163,7 +4163,7 @@
           <a:bodyPr/>
           <a:lstStyle/>
           <a:p>
-            <a:fld id="{31511459-1015-409D-BBDE-7055174C0320}" type="slidenum">
+            <a:fld id="{27AD784E-23E5-4A89-BEF9-E0BB36DAC455}" type="slidenum">
               <a:rPr lang="en-US"/>
               <a:t>‹#›</a:t>
             </a:fld>
@@ -4329,7 +4329,7 @@
           <a:bodyPr/>
           <a:lstStyle/>
           <a:p>
-            <a:fld id="{3D3BBE57-D0C6-4558-985A-A82B25BAB0BC}" type="slidenum">
+            <a:fld id="{36A44B9E-179E-436E-AFF1-7318ACB99BA4}" type="slidenum">
               <a:rPr lang="en-US"/>
               <a:t>‹#›</a:t>
             </a:fld>
